--- a/Jaipur_Site_Route_Analysis_Complete.pptx
+++ b/Jaipur_Site_Route_Analysis_Complete.pptx
@@ -6,12 +6,13 @@
   </p:sldMasterIdLst>
   <p:sldIdLst>
     <p:sldId id="256" r:id="rId2"/>
+    <p:sldId id="257" r:id="rId3"/>
   </p:sldIdLst>
   <p:notesMasterIdLst>
-    <p:notesMasterId r:id="rId3"/>
+    <p:notesMasterId r:id="rId4"/>
   </p:notesMasterIdLst>
-  <p:sldSz cx="9144000" cy="5143500"/>
-  <p:notesSz cx="5143500" cy="9144000"/>
+  <p:sldSz cx="12192000" cy="6858000"/>
+  <p:notesSz cx="6858000" cy="12192000"/>
   <p:defaultTextStyle>
     <a:lvl1pPr marL="0" algn="l" defTabSz="914400" rtl="0" eaLnBrk="1" latinLnBrk="0" hangingPunct="1">
       <a:defRPr sz="1800" kern="1200">
@@ -526,6 +527,94 @@
             <a:fld id="{F7021451-1387-4CA6-816F-3879F97B5CBC}" type="slidenum">
               <a:rPr lang="en-US"/>
               <a:t>1</a:t>
+            </a:fld>
+            <a:endParaRPr lang="en-US"/>
+          </a:p>
+        </p:txBody>
+      </p:sp>
+    </p:spTree>
+    <p:extLst>
+      <p:ext uri="{BB962C8B-B14F-4D97-AF65-F5344CB8AC3E}">
+        <p14:creationId xmlns:p14="http://schemas.microsoft.com/office/powerpoint/2010/main" val="1024086991"/>
+      </p:ext>
+    </p:extLst>
+  </p:cSld>
+  <p:clrMapOvr>
+    <a:masterClrMapping/>
+  </p:clrMapOvr>
+</p:notes>
+</file>
+
+<file path=ppt/notesSlides/notesSlide2.xml><?xml version="1.0" encoding="utf-8"?>
+<p:notes xmlns:a="http://schemas.openxmlformats.org/drawingml/2006/main" xmlns:r="http://schemas.openxmlformats.org/officeDocument/2006/relationships" xmlns:p="http://schemas.openxmlformats.org/presentationml/2006/main">
+  <p:cSld>
+    <p:spTree>
+      <p:nvGrpSpPr>
+        <p:cNvPr id="1" name=""/>
+        <p:cNvGrpSpPr/>
+        <p:nvPr/>
+      </p:nvGrpSpPr>
+      <p:grpSpPr>
+        <a:xfrm>
+          <a:off x="0" y="0"/>
+          <a:ext cx="0" cy="0"/>
+          <a:chOff x="0" y="0"/>
+          <a:chExt cx="0" cy="0"/>
+        </a:xfrm>
+      </p:grpSpPr>
+      <p:sp>
+        <p:nvSpPr>
+          <p:cNvPr id="2" name="Slide Image Placeholder 1"/>
+          <p:cNvSpPr>
+            <a:spLocks noGrp="1" noRot="1" noChangeAspect="1"/>
+          </p:cNvSpPr>
+          <p:nvPr>
+            <p:ph type="sldImg"/>
+          </p:nvPr>
+        </p:nvSpPr>
+        <p:spPr/>
+      </p:sp>
+      <p:sp>
+        <p:nvSpPr>
+          <p:cNvPr id="3" name="Notes Placeholder 2"/>
+          <p:cNvSpPr>
+            <a:spLocks noGrp="1"/>
+          </p:cNvSpPr>
+          <p:nvPr>
+            <p:ph type="body" idx="1"/>
+          </p:nvPr>
+        </p:nvSpPr>
+        <p:spPr/>
+        <p:txBody>
+          <a:bodyPr/>
+          <a:lstStyle/>
+          <a:p>
+            <a:r>
+              <a:rPr lang="en-US" dirty="0"/>
+              <a:t/>
+            </a:r>
+            <a:endParaRPr lang="en-US" dirty="0"/>
+          </a:p>
+        </p:txBody>
+      </p:sp>
+      <p:sp>
+        <p:nvSpPr>
+          <p:cNvPr id="4" name="Slide Number Placeholder 3"/>
+          <p:cNvSpPr>
+            <a:spLocks noGrp="1"/>
+          </p:cNvSpPr>
+          <p:nvPr>
+            <p:ph type="sldNum" sz="quarter" idx="10"/>
+          </p:nvPr>
+        </p:nvSpPr>
+        <p:spPr/>
+        <p:txBody>
+          <a:bodyPr/>
+          <a:lstStyle/>
+          <a:p>
+            <a:fld id="{F7021451-1387-4CA6-816F-3879F97B5CBC}" type="slidenum">
+              <a:rPr lang="en-US"/>
+              <a:t>2</a:t>
             </a:fld>
             <a:endParaRPr lang="en-US"/>
           </a:p>
@@ -854,6 +943,13 @@
 <file path=ppt/slides/slide1.xml><?xml version="1.0" encoding="utf-8"?>
 <p:sld xmlns:a="http://schemas.openxmlformats.org/drawingml/2006/main" xmlns:r="http://schemas.openxmlformats.org/officeDocument/2006/relationships" xmlns:p="http://schemas.openxmlformats.org/presentationml/2006/main">
   <p:cSld name="Slide 1">
+    <p:bg>
+      <p:bgPr>
+        <a:solidFill>
+          <a:srgbClr val="050811"/>
+        </a:solidFill>
+      </p:bgPr>
+    </p:bg>
     <p:spTree>
       <p:nvGrpSpPr>
         <p:cNvPr id="1" name=""/>
@@ -868,9 +964,112 @@
           <a:chExt cx="0" cy="0"/>
         </a:xfrm>
       </p:grpSpPr>
+      <p:sp>
+        <p:nvSpPr>
+          <p:cNvPr id="2" name="Shape 0"/>
+          <p:cNvSpPr/>
+          <p:nvPr/>
+        </p:nvSpPr>
+        <p:spPr>
+          <a:xfrm>
+            <a:off x="457200" y="365760"/>
+            <a:ext cx="11274552" cy="822960"/>
+          </a:xfrm>
+          <a:prstGeom prst="rect">
+            <a:avLst/>
+          </a:prstGeom>
+          <a:solidFill>
+            <a:srgbClr val="0B132B"/>
+          </a:solidFill>
+          <a:ln w="19050">
+            <a:solidFill>
+              <a:srgbClr val="00FF66"/>
+            </a:solidFill>
+            <a:prstDash val="solid"/>
+          </a:ln>
+        </p:spPr>
+      </p:sp>
+      <p:sp>
+        <p:nvSpPr>
+          <p:cNvPr id="3" name="Text 1"/>
+          <p:cNvSpPr/>
+          <p:nvPr/>
+        </p:nvSpPr>
+        <p:spPr>
+          <a:xfrm>
+            <a:off x="731520" y="457200"/>
+            <a:ext cx="7772400" cy="365760"/>
+          </a:xfrm>
+          <a:prstGeom prst="rect">
+            <a:avLst/>
+          </a:prstGeom>
+          <a:noFill/>
+          <a:ln/>
+        </p:spPr>
+        <p:txBody>
+          <a:bodyPr wrap="square" rtlCol="0" anchor="ctr"/>
+          <a:lstStyle/>
+          <a:p>
+            <a:pPr indent="0" marL="0">
+              <a:buNone/>
+            </a:pPr>
+            <a:r>
+              <a:rPr lang="en-US" sz="1800" b="1" dirty="0">
+                <a:solidFill>
+                  <a:srgbClr val="FFFFFF"/>
+                </a:solidFill>
+                <a:latin typeface="Arial" pitchFamily="34" charset="0"/>
+                <a:ea typeface="Arial" pitchFamily="34" charset="-122"/>
+                <a:cs typeface="Arial" pitchFamily="34" charset="-120"/>
+              </a:rPr>
+              <a:t>JAIPUR COMPLETE CORRIDOR ACCESS ANALYSIS</a:t>
+            </a:r>
+            <a:endParaRPr lang="en-US" sz="1800" dirty="0"/>
+          </a:p>
+        </p:txBody>
+      </p:sp>
+      <p:sp>
+        <p:nvSpPr>
+          <p:cNvPr id="4" name="Text 2"/>
+          <p:cNvSpPr/>
+          <p:nvPr/>
+        </p:nvSpPr>
+        <p:spPr>
+          <a:xfrm>
+            <a:off x="731520" y="822960"/>
+            <a:ext cx="10058400" cy="274320"/>
+          </a:xfrm>
+          <a:prstGeom prst="rect">
+            <a:avLst/>
+          </a:prstGeom>
+          <a:noFill/>
+          <a:ln/>
+        </p:spPr>
+        <p:txBody>
+          <a:bodyPr wrap="square" rtlCol="0" anchor="ctr"/>
+          <a:lstStyle/>
+          <a:p>
+            <a:pPr indent="0" marL="0">
+              <a:buNone/>
+            </a:pPr>
+            <a:r>
+              <a:rPr lang="en-US" sz="1100" dirty="0">
+                <a:solidFill>
+                  <a:srgbClr val="00E5FF"/>
+                </a:solidFill>
+                <a:latin typeface="Arial" pitchFamily="34" charset="0"/>
+                <a:ea typeface="Arial" pitchFamily="34" charset="-122"/>
+                <a:cs typeface="Arial" pitchFamily="34" charset="-120"/>
+              </a:rPr>
+              <a:t>📍 Saral Bihari Corridor | Untitled Placemark | Navchetna School | Ring Road Interchange</a:t>
+            </a:r>
+            <a:endParaRPr lang="en-US" sz="1100" dirty="0"/>
+          </a:p>
+        </p:txBody>
+      </p:sp>
       <p:pic>
         <p:nvPicPr>
-          <p:cNvPr id="2" name="Image 0" descr="D:\ppt\assets\single_complete_route.jpg">    </p:cNvPr>
+          <p:cNvPr id="5" name="Image 0" descr="D:\ppt\assets\single_complete_route.jpg">    </p:cNvPr>
           <p:cNvPicPr>
             <a:picLocks noChangeAspect="1"/>
           </p:cNvPicPr>
@@ -883,8 +1082,8 @@
         </p:blipFill>
         <p:spPr>
           <a:xfrm>
-            <a:off x="0" y="0"/>
-            <a:ext cx="12191695" cy="6858000"/>
+            <a:off x="457200" y="1371600"/>
+            <a:ext cx="7498080" cy="4754880"/>
           </a:xfrm>
           <a:prstGeom prst="rect">
             <a:avLst/>
@@ -893,28 +1092,26 @@
       </p:pic>
       <p:sp>
         <p:nvSpPr>
-          <p:cNvPr id="3" name="Shape 0"/>
+          <p:cNvPr id="6" name="Shape 3"/>
           <p:cNvSpPr/>
           <p:nvPr/>
         </p:nvSpPr>
         <p:spPr>
           <a:xfrm>
-            <a:off x="457200" y="365760"/>
-            <a:ext cx="11277295" cy="731520"/>
+            <a:off x="8229600" y="1371600"/>
+            <a:ext cx="3474720" cy="4754880"/>
           </a:xfrm>
           <a:prstGeom prst="roundRect">
             <a:avLst>
-              <a:gd name="adj" fmla="val 12500"/>
+              <a:gd name="adj" fmla="val 2632"/>
             </a:avLst>
           </a:prstGeom>
           <a:solidFill>
-            <a:srgbClr val="070B14">
-              <a:alpha val="85000"/>
-            </a:srgbClr>
-          </a:solidFill>
-          <a:ln w="19050">
+            <a:srgbClr val="0B132B"/>
+          </a:solidFill>
+          <a:ln w="12700">
             <a:solidFill>
-              <a:srgbClr val="00FF66"/>
+              <a:srgbClr val="2A3B5C"/>
             </a:solidFill>
             <a:prstDash val="solid"/>
           </a:ln>
@@ -922,14 +1119,14 @@
       </p:sp>
       <p:sp>
         <p:nvSpPr>
-          <p:cNvPr id="4" name="Text 1"/>
+          <p:cNvPr id="7" name="Text 4"/>
           <p:cNvSpPr/>
           <p:nvPr/>
         </p:nvSpPr>
         <p:spPr>
           <a:xfrm>
-            <a:off x="731520" y="411480"/>
-            <a:ext cx="6858000" cy="320040"/>
+            <a:off x="8412480" y="1554480"/>
+            <a:ext cx="3108960" cy="320040"/>
           </a:xfrm>
           <a:prstGeom prst="rect">
             <a:avLst/>
@@ -947,13 +1144,13 @@
             <a:r>
               <a:rPr lang="en-US" sz="1300" b="1" dirty="0">
                 <a:solidFill>
-                  <a:srgbClr val="FFFFFF"/>
+                  <a:srgbClr val="00FF66"/>
                 </a:solidFill>
-                <a:latin typeface="Calibri" pitchFamily="34" charset="0"/>
-                <a:ea typeface="Calibri" pitchFamily="34" charset="-122"/>
-                <a:cs typeface="Calibri" pitchFamily="34" charset="-120"/>
+                <a:latin typeface="Arial" pitchFamily="34" charset="0"/>
+                <a:ea typeface="Arial" pitchFamily="34" charset="-122"/>
+                <a:cs typeface="Arial" pitchFamily="34" charset="-120"/>
               </a:rPr>
-              <a:t>JAIPUR SITE COMPLETE CORRIDOR ACCESS &amp; HIGHWAY CONNECTIVITY</a:t>
+              <a:t>CORRIDOR TELEMETRY</a:t>
             </a:r>
             <a:endParaRPr lang="en-US" sz="1300" dirty="0"/>
           </a:p>
@@ -961,14 +1158,14 @@
       </p:sp>
       <p:sp>
         <p:nvSpPr>
-          <p:cNvPr id="5" name="Text 2"/>
+          <p:cNvPr id="8" name="Text 5"/>
           <p:cNvSpPr/>
           <p:nvPr/>
         </p:nvSpPr>
         <p:spPr>
           <a:xfrm>
-            <a:off x="731520" y="731520"/>
-            <a:ext cx="6858000" cy="274320"/>
+            <a:off x="8412480" y="2011680"/>
+            <a:ext cx="3108960" cy="3840480"/>
           </a:xfrm>
           <a:prstGeom prst="rect">
             <a:avLst/>
@@ -981,43 +1178,161 @@
           <a:lstStyle/>
           <a:p>
             <a:pPr indent="0" marL="0">
+              <a:lnSpc>
+                <a:spcPts val="1800"/>
+              </a:lnSpc>
               <a:buNone/>
             </a:pPr>
             <a:r>
-              <a:rPr lang="en-US" sz="1000" b="1" dirty="0">
+              <a:rPr lang="en-US" sz="1000" dirty="0">
                 <a:solidFill>
-                  <a:srgbClr val="00E5FF"/>
+                  <a:srgbClr val="E2E8F0"/>
                 </a:solidFill>
-                <a:latin typeface="Consolas" pitchFamily="34" charset="0"/>
-                <a:ea typeface="Consolas" pitchFamily="34" charset="-122"/>
-                <a:cs typeface="Consolas" pitchFamily="34" charset="-120"/>
+                <a:latin typeface="Arial" pitchFamily="34" charset="0"/>
+                <a:ea typeface="Arial" pitchFamily="34" charset="-122"/>
+                <a:cs typeface="Arial" pitchFamily="34" charset="-120"/>
               </a:rPr>
-              <a:t>📍 GPS: 26°44'10.69"N, 75°52'21.88"E  |  JAIPUR RING ROAD (148C / TOLL ROAD)</a:t>
+              <a:t>🛣️ Highway Ingress: Direct grade access off arterial corridor near Saral Bihari Temple</a:t>
             </a:r>
             <a:endParaRPr lang="en-US" sz="1000" dirty="0"/>
           </a:p>
+          <a:p>
+            <a:pPr indent="0" marL="0">
+              <a:lnSpc>
+                <a:spcPts val="1800"/>
+              </a:lnSpc>
+              <a:buNone/>
+            </a:pPr>
+            <a:endParaRPr lang="en-US" sz="1000" dirty="0"/>
+          </a:p>
+          <a:p>
+            <a:pPr indent="0" marL="0">
+              <a:lnSpc>
+                <a:spcPts val="1800"/>
+              </a:lnSpc>
+              <a:buNone/>
+            </a:pPr>
+            <a:r>
+              <a:rPr lang="en-US" sz="1000" dirty="0">
+                <a:solidFill>
+                  <a:srgbClr val="E2E8F0"/>
+                </a:solidFill>
+                <a:latin typeface="Arial" pitchFamily="34" charset="0"/>
+                <a:ea typeface="Arial" pitchFamily="34" charset="-122"/>
+                <a:cs typeface="Arial" pitchFamily="34" charset="-120"/>
+              </a:rPr>
+              <a:t>📍 Untitled Placemark: Prime development sector pinpointed at 26°44'10.69"N, 75°52'21.88"E</a:t>
+            </a:r>
+            <a:endParaRPr lang="en-US" sz="1000" dirty="0"/>
+          </a:p>
+          <a:p>
+            <a:pPr indent="0" marL="0">
+              <a:lnSpc>
+                <a:spcPts val="1800"/>
+              </a:lnSpc>
+              <a:buNone/>
+            </a:pPr>
+            <a:endParaRPr lang="en-US" sz="1000" dirty="0"/>
+          </a:p>
+          <a:p>
+            <a:pPr indent="0" marL="0">
+              <a:lnSpc>
+                <a:spcPts val="1800"/>
+              </a:lnSpc>
+              <a:buNone/>
+            </a:pPr>
+            <a:r>
+              <a:rPr lang="en-US" sz="1000" dirty="0">
+                <a:solidFill>
+                  <a:srgbClr val="E2E8F0"/>
+                </a:solidFill>
+                <a:latin typeface="Arial" pitchFamily="34" charset="0"/>
+                <a:ea typeface="Arial" pitchFamily="34" charset="-122"/>
+                <a:cs typeface="Arial" pitchFamily="34" charset="-120"/>
+              </a:rPr>
+              <a:t>🏫 Educational Landmark: Navchetna Mansik Avm Mook Badhir School terminal junction</a:t>
+            </a:r>
+            <a:endParaRPr lang="en-US" sz="1000" dirty="0"/>
+          </a:p>
+          <a:p>
+            <a:pPr indent="0" marL="0">
+              <a:lnSpc>
+                <a:spcPts val="1800"/>
+              </a:lnSpc>
+              <a:buNone/>
+            </a:pPr>
+            <a:endParaRPr lang="en-US" sz="1000" dirty="0"/>
+          </a:p>
+          <a:p>
+            <a:pPr indent="0" marL="0">
+              <a:lnSpc>
+                <a:spcPts val="1800"/>
+              </a:lnSpc>
+              <a:buNone/>
+            </a:pPr>
+            <a:r>
+              <a:rPr lang="en-US" sz="1000" dirty="0">
+                <a:solidFill>
+                  <a:srgbClr val="E2E8F0"/>
+                </a:solidFill>
+                <a:latin typeface="Arial" pitchFamily="34" charset="0"/>
+                <a:ea typeface="Arial" pitchFamily="34" charset="-122"/>
+                <a:cs typeface="Arial" pitchFamily="34" charset="-120"/>
+              </a:rPr>
+              <a:t>🔄 Multi-Directional: Seamless bi-directional circulation to Balaji Temple &amp; Western Link</a:t>
+            </a:r>
+            <a:endParaRPr lang="en-US" sz="1000" dirty="0"/>
+          </a:p>
         </p:txBody>
       </p:sp>
-      <p:sp>
-        <p:nvSpPr>
-          <p:cNvPr id="6" name="Shape 3"/>
+    </p:spTree>
+  </p:cSld>
+  <p:clrMapOvr>
+    <a:masterClrMapping/>
+  </p:clrMapOvr>
+</p:sld>
+</file>
+
+<file path=ppt/slides/slide2.xml><?xml version="1.0" encoding="utf-8"?>
+<p:sld xmlns:a="http://schemas.openxmlformats.org/drawingml/2006/main" xmlns:r="http://schemas.openxmlformats.org/officeDocument/2006/relationships" xmlns:p="http://schemas.openxmlformats.org/presentationml/2006/main">
+  <p:cSld name="Slide 2">
+    <p:bg>
+      <p:bgPr>
+        <a:solidFill>
+          <a:srgbClr val="050811"/>
+        </a:solidFill>
+      </p:bgPr>
+    </p:bg>
+    <p:spTree>
+      <p:nvGrpSpPr>
+        <p:cNvPr id="1" name=""/>
+        <p:cNvGrpSpPr/>
+        <p:nvPr/>
+      </p:nvGrpSpPr>
+      <p:grpSpPr>
+        <a:xfrm>
+          <a:off x="0" y="0"/>
+          <a:ext cx="0" cy="0"/>
+          <a:chOff x="0" y="0"/>
+          <a:chExt cx="0" cy="0"/>
+        </a:xfrm>
+      </p:grpSpPr>
+      <p:sp>
+        <p:nvSpPr>
+          <p:cNvPr id="2" name="Shape 0"/>
           <p:cNvSpPr/>
           <p:nvPr/>
         </p:nvSpPr>
         <p:spPr>
           <a:xfrm>
-            <a:off x="8046720" y="1371600"/>
-            <a:ext cx="3657600" cy="4937760"/>
+            <a:off x="457200" y="365760"/>
+            <a:ext cx="11274552" cy="731520"/>
           </a:xfrm>
-          <a:prstGeom prst="roundRect">
-            <a:avLst>
-              <a:gd name="adj" fmla="val 3750"/>
-            </a:avLst>
+          <a:prstGeom prst="rect">
+            <a:avLst/>
           </a:prstGeom>
           <a:solidFill>
-            <a:srgbClr val="0B132B">
-              <a:alpha val="90000"/>
-            </a:srgbClr>
+            <a:srgbClr val="0B132B"/>
           </a:solidFill>
           <a:ln w="19050">
             <a:solidFill>
@@ -1029,14 +1344,14 @@
       </p:sp>
       <p:sp>
         <p:nvSpPr>
-          <p:cNvPr id="7" name="Text 4"/>
+          <p:cNvPr id="3" name="Text 1"/>
           <p:cNvSpPr/>
           <p:nvPr/>
         </p:nvSpPr>
         <p:spPr>
           <a:xfrm>
-            <a:off x="8321040" y="1554480"/>
-            <a:ext cx="3108960" cy="274320"/>
+            <a:off x="731520" y="502920"/>
+            <a:ext cx="10058400" cy="411480"/>
           </a:xfrm>
           <a:prstGeom prst="rect">
             <a:avLst/>
@@ -1052,278 +1367,43 @@
               <a:buNone/>
             </a:pPr>
             <a:r>
-              <a:rPr lang="en-US" sz="1100" b="1" dirty="0">
+              <a:rPr lang="en-US" sz="1600" b="1" dirty="0">
                 <a:solidFill>
-                  <a:srgbClr val="00FF66"/>
+                  <a:srgbClr val="FFFFFF"/>
                 </a:solidFill>
-                <a:latin typeface="Calibri" pitchFamily="34" charset="0"/>
-                <a:ea typeface="Calibri" pitchFamily="34" charset="-122"/>
-                <a:cs typeface="Calibri" pitchFamily="34" charset="-120"/>
+                <a:latin typeface="Arial" pitchFamily="34" charset="0"/>
+                <a:ea typeface="Arial" pitchFamily="34" charset="-122"/>
+                <a:cs typeface="Arial" pitchFamily="34" charset="-120"/>
               </a:rPr>
-              <a:t>KEY ROUTE ANNOTATIONS</a:t>
+              <a:t>MASTER SITE ACCESS &amp; ROUTE NETWORK PLAN</a:t>
             </a:r>
-            <a:endParaRPr lang="en-US" sz="1100" dirty="0"/>
+            <a:endParaRPr lang="en-US" sz="1600" dirty="0"/>
           </a:p>
         </p:txBody>
       </p:sp>
-      <p:sp>
-        <p:nvSpPr>
-          <p:cNvPr id="8" name="Text 5"/>
-          <p:cNvSpPr/>
+      <p:pic>
+        <p:nvPicPr>
+          <p:cNvPr id="4" name="Image 0" descr="D:\ppt\assets\clean_single_complete_route.jpg">    </p:cNvPr>
+          <p:cNvPicPr>
+            <a:picLocks noChangeAspect="1"/>
+          </p:cNvPicPr>
           <p:nvPr/>
-        </p:nvSpPr>
+        </p:nvPicPr>
+        <p:blipFill>
+          <a:blip r:embed="rId1"/>
+          <a:srcRect l="0" r="0" t="0" b="0"/>
+          <a:stretch/>
+        </p:blipFill>
         <p:spPr>
           <a:xfrm>
-            <a:off x="8321040" y="1920240"/>
-            <a:ext cx="3108960" cy="4206240"/>
+            <a:off x="457200" y="1280160"/>
+            <a:ext cx="11274552" cy="4937760"/>
           </a:xfrm>
           <a:prstGeom prst="rect">
             <a:avLst/>
           </a:prstGeom>
-          <a:noFill/>
-          <a:ln/>
         </p:spPr>
-        <p:txBody>
-          <a:bodyPr wrap="square" rtlCol="0" anchor="ctr"/>
-          <a:lstStyle/>
-          <a:p>
-            <a:pPr indent="0" marL="0">
-              <a:lnSpc>
-                <a:spcPts val="1300"/>
-              </a:lnSpc>
-              <a:buNone/>
-            </a:pPr>
-            <a:r>
-              <a:rPr lang="en-US" sz="950" dirty="0">
-                <a:solidFill>
-                  <a:srgbClr val="F1F5F9"/>
-                </a:solidFill>
-                <a:latin typeface="Calibri" pitchFamily="34" charset="0"/>
-                <a:ea typeface="Calibri" pitchFamily="34" charset="-122"/>
-                <a:cs typeface="Calibri" pitchFamily="34" charset="-120"/>
-              </a:rPr>
-              <a:t>1️⃣ Highway Ingress (West):</a:t>
-            </a:r>
-            <a:endParaRPr lang="en-US" sz="950" dirty="0"/>
-          </a:p>
-          <a:p>
-            <a:pPr indent="0" marL="0">
-              <a:lnSpc>
-                <a:spcPts val="1300"/>
-              </a:lnSpc>
-              <a:buNone/>
-            </a:pPr>
-            <a:r>
-              <a:rPr lang="en-US" sz="950" dirty="0">
-                <a:solidFill>
-                  <a:srgbClr val="F1F5F9"/>
-                </a:solidFill>
-                <a:latin typeface="Calibri" pitchFamily="34" charset="0"/>
-                <a:ea typeface="Calibri" pitchFamily="34" charset="-122"/>
-                <a:cs typeface="Calibri" pitchFamily="34" charset="-120"/>
-              </a:rPr>
-              <a:t>Entry from west road corridor passing Saral Bihari Temple.</a:t>
-            </a:r>
-            <a:endParaRPr lang="en-US" sz="950" dirty="0"/>
-          </a:p>
-          <a:p>
-            <a:pPr indent="0" marL="0">
-              <a:lnSpc>
-                <a:spcPts val="1300"/>
-              </a:lnSpc>
-              <a:buNone/>
-            </a:pPr>
-            <a:endParaRPr lang="en-US" sz="950" dirty="0"/>
-          </a:p>
-          <a:p>
-            <a:pPr indent="0" marL="0">
-              <a:lnSpc>
-                <a:spcPts val="1300"/>
-              </a:lnSpc>
-              <a:buNone/>
-            </a:pPr>
-            <a:r>
-              <a:rPr lang="en-US" sz="950" dirty="0">
-                <a:solidFill>
-                  <a:srgbClr val="F1F5F9"/>
-                </a:solidFill>
-                <a:latin typeface="Calibri" pitchFamily="34" charset="0"/>
-                <a:ea typeface="Calibri" pitchFamily="34" charset="-122"/>
-                <a:cs typeface="Calibri" pitchFamily="34" charset="-120"/>
-              </a:rPr>
-              <a:t>2️⃣ Untitled Placemark Pin:</a:t>
-            </a:r>
-            <a:endParaRPr lang="en-US" sz="950" dirty="0"/>
-          </a:p>
-          <a:p>
-            <a:pPr indent="0" marL="0">
-              <a:lnSpc>
-                <a:spcPts val="1300"/>
-              </a:lnSpc>
-              <a:buNone/>
-            </a:pPr>
-            <a:r>
-              <a:rPr lang="en-US" sz="950" dirty="0">
-                <a:solidFill>
-                  <a:srgbClr val="F1F5F9"/>
-                </a:solidFill>
-                <a:latin typeface="Calibri" pitchFamily="34" charset="0"/>
-                <a:ea typeface="Calibri" pitchFamily="34" charset="-122"/>
-                <a:cs typeface="Calibri" pitchFamily="34" charset="-120"/>
-              </a:rPr>
-              <a:t>Central survey base at 26°44'10.69"N, 75°52'21.88"E.</a:t>
-            </a:r>
-            <a:endParaRPr lang="en-US" sz="950" dirty="0"/>
-          </a:p>
-          <a:p>
-            <a:pPr indent="0" marL="0">
-              <a:lnSpc>
-                <a:spcPts val="1300"/>
-              </a:lnSpc>
-              <a:buNone/>
-            </a:pPr>
-            <a:endParaRPr lang="en-US" sz="950" dirty="0"/>
-          </a:p>
-          <a:p>
-            <a:pPr indent="0" marL="0">
-              <a:lnSpc>
-                <a:spcPts val="1300"/>
-              </a:lnSpc>
-              <a:buNone/>
-            </a:pPr>
-            <a:r>
-              <a:rPr lang="en-US" sz="950" dirty="0">
-                <a:solidFill>
-                  <a:srgbClr val="F1F5F9"/>
-                </a:solidFill>
-                <a:latin typeface="Calibri" pitchFamily="34" charset="0"/>
-                <a:ea typeface="Calibri" pitchFamily="34" charset="-122"/>
-                <a:cs typeface="Calibri" pitchFamily="34" charset="-120"/>
-              </a:rPr>
-              <a:t>3️⃣ North Arm (Mathurawala):</a:t>
-            </a:r>
-            <a:endParaRPr lang="en-US" sz="950" dirty="0"/>
-          </a:p>
-          <a:p>
-            <a:pPr indent="0" marL="0">
-              <a:lnSpc>
-                <a:spcPts val="1300"/>
-              </a:lnSpc>
-              <a:buNone/>
-            </a:pPr>
-            <a:r>
-              <a:rPr lang="en-US" sz="950" dirty="0">
-                <a:solidFill>
-                  <a:srgbClr val="F1F5F9"/>
-                </a:solidFill>
-                <a:latin typeface="Calibri" pitchFamily="34" charset="0"/>
-                <a:ea typeface="Calibri" pitchFamily="34" charset="-122"/>
-                <a:cs typeface="Calibri" pitchFamily="34" charset="-120"/>
-              </a:rPr>
-              <a:t>Connecting north towards Mathurawala sector grid.</a:t>
-            </a:r>
-            <a:endParaRPr lang="en-US" sz="950" dirty="0"/>
-          </a:p>
-          <a:p>
-            <a:pPr indent="0" marL="0">
-              <a:lnSpc>
-                <a:spcPts val="1300"/>
-              </a:lnSpc>
-              <a:buNone/>
-            </a:pPr>
-            <a:endParaRPr lang="en-US" sz="950" dirty="0"/>
-          </a:p>
-          <a:p>
-            <a:pPr indent="0" marL="0">
-              <a:lnSpc>
-                <a:spcPts val="1300"/>
-              </a:lnSpc>
-              <a:buNone/>
-            </a:pPr>
-            <a:r>
-              <a:rPr lang="en-US" sz="950" dirty="0">
-                <a:solidFill>
-                  <a:srgbClr val="F1F5F9"/>
-                </a:solidFill>
-                <a:latin typeface="Calibri" pitchFamily="34" charset="0"/>
-                <a:ea typeface="Calibri" pitchFamily="34" charset="-122"/>
-                <a:cs typeface="Calibri" pitchFamily="34" charset="-120"/>
-              </a:rPr>
-              <a:t>4️⃣ Southbound Corridor Link:</a:t>
-            </a:r>
-            <a:endParaRPr lang="en-US" sz="950" dirty="0"/>
-          </a:p>
-          <a:p>
-            <a:pPr indent="0" marL="0">
-              <a:lnSpc>
-                <a:spcPts val="1300"/>
-              </a:lnSpc>
-              <a:buNone/>
-            </a:pPr>
-            <a:r>
-              <a:rPr lang="en-US" sz="950" dirty="0">
-                <a:solidFill>
-                  <a:srgbClr val="F1F5F9"/>
-                </a:solidFill>
-                <a:latin typeface="Calibri" pitchFamily="34" charset="0"/>
-                <a:ea typeface="Calibri" pitchFamily="34" charset="-122"/>
-                <a:cs typeface="Calibri" pitchFamily="34" charset="-120"/>
-              </a:rPr>
-              <a:t>Straight linear bypass connecting south to Jaipur Ring Road.</a:t>
-            </a:r>
-            <a:endParaRPr lang="en-US" sz="950" dirty="0"/>
-          </a:p>
-          <a:p>
-            <a:pPr indent="0" marL="0">
-              <a:lnSpc>
-                <a:spcPts val="1300"/>
-              </a:lnSpc>
-              <a:buNone/>
-            </a:pPr>
-            <a:endParaRPr lang="en-US" sz="950" dirty="0"/>
-          </a:p>
-          <a:p>
-            <a:pPr indent="0" marL="0">
-              <a:lnSpc>
-                <a:spcPts val="1300"/>
-              </a:lnSpc>
-              <a:buNone/>
-            </a:pPr>
-            <a:r>
-              <a:rPr lang="en-US" sz="950" dirty="0">
-                <a:solidFill>
-                  <a:srgbClr val="F1F5F9"/>
-                </a:solidFill>
-                <a:latin typeface="Calibri" pitchFamily="34" charset="0"/>
-                <a:ea typeface="Calibri" pitchFamily="34" charset="-122"/>
-                <a:cs typeface="Calibri" pitchFamily="34" charset="-120"/>
-              </a:rPr>
-              <a:t>5️⃣ Jaipur Ring Rd (148C / Toll):</a:t>
-            </a:r>
-            <a:endParaRPr lang="en-US" sz="950" dirty="0"/>
-          </a:p>
-          <a:p>
-            <a:pPr indent="0" marL="0">
-              <a:lnSpc>
-                <a:spcPts val="1300"/>
-              </a:lnSpc>
-              <a:buNone/>
-            </a:pPr>
-            <a:r>
-              <a:rPr lang="en-US" sz="950" dirty="0">
-                <a:solidFill>
-                  <a:srgbClr val="F1F5F9"/>
-                </a:solidFill>
-                <a:latin typeface="Calibri" pitchFamily="34" charset="0"/>
-                <a:ea typeface="Calibri" pitchFamily="34" charset="-122"/>
-                <a:cs typeface="Calibri" pitchFamily="34" charset="-120"/>
-              </a:rPr>
-              <a:t>Multi-lane high-speed expressway interchange loop.</a:t>
-            </a:r>
-            <a:endParaRPr lang="en-US" sz="950" dirty="0"/>
-          </a:p>
-        </p:txBody>
-      </p:sp>
+      </p:pic>
     </p:spTree>
   </p:cSld>
   <p:clrMapOvr>
